--- a/assets/pptx/catalog-282.pptx
+++ b/assets/pptx/catalog-282.pptx
@@ -3304,7 +3304,7 @@
                 <a:ea typeface="Ebrima"/>
                 <a:cs typeface="Ebrima"/>
               </a:rPr>
-              <a:t>የነገውን ዘመን እናያለን (2x)</a:t>
+              <a:t>የነገውን ዘመን እናያለን 2x</a:t>
             </a:r>
           </a:p>
         </p:txBody>
@@ -3425,7 +3425,7 @@
                 <a:ea typeface="Ebrima"/>
                 <a:cs typeface="Ebrima"/>
               </a:rPr>
-              <a:t>ኢየሱስ ኃይልህ ብርቱ ነው (2x)</a:t>
+              <a:t>ኢየሱስ ኃይልህ ብርቱ ነው 2x</a:t>
             </a:r>
           </a:p>
         </p:txBody>
@@ -3546,7 +3546,7 @@
                 <a:ea typeface="Ebrima"/>
                 <a:cs typeface="Ebrima"/>
               </a:rPr>
-              <a:t>ኢየሱስ ኃይልህ ብርቱ ነው (2x)</a:t>
+              <a:t>ኢየሱስ ኃይልህ ብርቱ ነው 2x</a:t>
             </a:r>
           </a:p>
         </p:txBody>
@@ -3788,7 +3788,7 @@
                 <a:ea typeface="Ebrima"/>
                 <a:cs typeface="Ebrima"/>
               </a:rPr>
-              <a:t>መጠቀሚያው ነን እኛ ገንዘቡ (2x)</a:t>
+              <a:t>መጠቀሚያው ነን እኛ ገንዘቡ 2x</a:t>
             </a:r>
           </a:p>
         </p:txBody>
@@ -3909,7 +3909,7 @@
                 <a:ea typeface="Ebrima"/>
                 <a:cs typeface="Ebrima"/>
               </a:rPr>
-              <a:t>ኢየሱስ ኃይልህ ብርቱ ነው (2x)</a:t>
+              <a:t>ኢየሱስ ኃይልህ ብርቱ ነው 2x</a:t>
             </a:r>
           </a:p>
         </p:txBody>
@@ -4151,7 +4151,7 @@
                 <a:ea typeface="Ebrima"/>
                 <a:cs typeface="Ebrima"/>
               </a:rPr>
-              <a:t>እግዚአብሔር ሀሳቡ እኛ ላይ ነው (2x)</a:t>
+              <a:t>እግዚአብሔር ሀሳቡ እኛ ላይ ነው 2x</a:t>
             </a:r>
           </a:p>
         </p:txBody>
@@ -4272,7 +4272,7 @@
                 <a:ea typeface="Ebrima"/>
                 <a:cs typeface="Ebrima"/>
               </a:rPr>
-              <a:t>ኢየሱስ ኃይልህ ብርቱ ነው (2x)</a:t>
+              <a:t>ኢየሱስ ኃይልህ ብርቱ ነው 2x</a:t>
             </a:r>
           </a:p>
         </p:txBody>
